--- a/docs/LayCAT_紹介プレゼン.pptx
+++ b/docs/LayCAT_紹介プレゼン.pptx
@@ -17,6 +17,7 @@
     <p:sldId id="265" r:id="rId16"/>
     <p:sldId id="266" r:id="rId17"/>
     <p:sldId id="267" r:id="rId18"/>
+    <p:sldId id="268" r:id="rId19"/>
   </p:sldIdLst>
   <p:sldSz cx="12191695" cy="6858000" type="screen4x3"/>
   <p:notesSz cx="6858000" cy="9144000"/>
@@ -5257,6 +5258,285 @@
                 <a:ea typeface="Meiryo"/>
               </a:rPr>
               <a:t>公開URL：https://ogshaw03.github.io/laycat/</a:t>
+            </a:r>
+          </a:p>
+        </p:txBody>
+      </p:sp>
+    </p:spTree>
+  </p:cSld>
+  <p:clrMapOvr>
+    <a:masterClrMapping/>
+  </p:clrMapOvr>
+</p:sld>
+</file>
+
+<file path=ppt/slides/slide13.xml><?xml version="1.0" encoding="utf-8"?>
+<p:sld xmlns:a="http://schemas.openxmlformats.org/drawingml/2006/main" xmlns:p="http://schemas.openxmlformats.org/presentationml/2006/main" xmlns:r="http://schemas.openxmlformats.org/officeDocument/2006/relationships">
+  <p:cSld>
+    <p:spTree>
+      <p:nvGrpSpPr>
+        <p:cNvPr id="1" name=""/>
+        <p:cNvGrpSpPr/>
+        <p:nvPr/>
+      </p:nvGrpSpPr>
+      <p:grpSpPr/>
+      <p:sp>
+        <p:nvSpPr>
+          <p:cNvPr id="2" name="Rectangle 1"/>
+          <p:cNvSpPr/>
+          <p:nvPr/>
+        </p:nvSpPr>
+        <p:spPr>
+          <a:xfrm>
+            <a:off x="0" y="0"/>
+            <a:ext cx="12191695" cy="6858000"/>
+          </a:xfrm>
+          <a:prstGeom prst="rect">
+            <a:avLst/>
+          </a:prstGeom>
+          <a:solidFill>
+            <a:srgbClr val="0D0D0F"/>
+          </a:solidFill>
+          <a:ln>
+            <a:noFill/>
+          </a:ln>
+          <a:effectLst/>
+        </p:spPr>
+        <p:style>
+          <a:lnRef idx="1">
+            <a:schemeClr val="accent1"/>
+          </a:lnRef>
+          <a:fillRef idx="3">
+            <a:schemeClr val="accent1"/>
+          </a:fillRef>
+          <a:effectRef idx="2">
+            <a:schemeClr val="accent1"/>
+          </a:effectRef>
+          <a:fontRef idx="minor">
+            <a:schemeClr val="lt1"/>
+          </a:fontRef>
+        </p:style>
+        <p:txBody>
+          <a:bodyPr rtlCol="0" anchor="ctr"/>
+          <a:lstStyle/>
+          <a:p>
+            <a:pPr algn="ctr"/>
+          </a:p>
+        </p:txBody>
+      </p:sp>
+      <p:sp>
+        <p:nvSpPr>
+          <p:cNvPr id="3" name="Rectangle 2"/>
+          <p:cNvSpPr/>
+          <p:nvPr/>
+        </p:nvSpPr>
+        <p:spPr>
+          <a:xfrm>
+            <a:off x="0" y="0"/>
+            <a:ext cx="256032" cy="6858000"/>
+          </a:xfrm>
+          <a:prstGeom prst="rect">
+            <a:avLst/>
+          </a:prstGeom>
+          <a:solidFill>
+            <a:srgbClr val="5A9BFF"/>
+          </a:solidFill>
+          <a:ln>
+            <a:noFill/>
+          </a:ln>
+          <a:effectLst/>
+        </p:spPr>
+        <p:style>
+          <a:lnRef idx="1">
+            <a:schemeClr val="accent1"/>
+          </a:lnRef>
+          <a:fillRef idx="3">
+            <a:schemeClr val="accent1"/>
+          </a:fillRef>
+          <a:effectRef idx="2">
+            <a:schemeClr val="accent1"/>
+          </a:effectRef>
+          <a:fontRef idx="minor">
+            <a:schemeClr val="lt1"/>
+          </a:fontRef>
+        </p:style>
+        <p:txBody>
+          <a:bodyPr rtlCol="0" anchor="ctr"/>
+          <a:lstStyle/>
+          <a:p>
+            <a:pPr algn="ctr"/>
+          </a:p>
+        </p:txBody>
+      </p:sp>
+      <p:sp>
+        <p:nvSpPr>
+          <p:cNvPr id="4" name="Rectangle 3"/>
+          <p:cNvSpPr/>
+          <p:nvPr/>
+        </p:nvSpPr>
+        <p:spPr>
+          <a:xfrm>
+            <a:off x="256032" y="0"/>
+            <a:ext cx="91440" cy="6858000"/>
+          </a:xfrm>
+          <a:prstGeom prst="rect">
+            <a:avLst/>
+          </a:prstGeom>
+          <a:solidFill>
+            <a:srgbClr val="A56BF0"/>
+          </a:solidFill>
+          <a:ln>
+            <a:noFill/>
+          </a:ln>
+          <a:effectLst/>
+        </p:spPr>
+        <p:style>
+          <a:lnRef idx="1">
+            <a:schemeClr val="accent1"/>
+          </a:lnRef>
+          <a:fillRef idx="3">
+            <a:schemeClr val="accent1"/>
+          </a:fillRef>
+          <a:effectRef idx="2">
+            <a:schemeClr val="accent1"/>
+          </a:effectRef>
+          <a:fontRef idx="minor">
+            <a:schemeClr val="lt1"/>
+          </a:fontRef>
+        </p:style>
+        <p:txBody>
+          <a:bodyPr rtlCol="0" anchor="ctr"/>
+          <a:lstStyle/>
+          <a:p>
+            <a:pPr algn="ctr"/>
+          </a:p>
+        </p:txBody>
+      </p:sp>
+      <p:pic>
+        <p:nvPicPr>
+          <p:cNvPr id="5" name="Picture 4" descr="laycat_icon.png"/>
+          <p:cNvPicPr>
+            <a:picLocks noChangeAspect="1"/>
+          </p:cNvPicPr>
+          <p:nvPr/>
+        </p:nvPicPr>
+        <p:blipFill>
+          <a:blip r:embed="rId2"/>
+          <a:stretch>
+            <a:fillRect/>
+          </a:stretch>
+        </p:blipFill>
+        <p:spPr>
+          <a:xfrm>
+            <a:off x="3078327" y="2148840"/>
+            <a:ext cx="6035040" cy="1569110"/>
+          </a:xfrm>
+          <a:prstGeom prst="rect">
+            <a:avLst/>
+          </a:prstGeom>
+        </p:spPr>
+      </p:pic>
+      <p:sp>
+        <p:nvSpPr>
+          <p:cNvPr id="6" name="TextBox 5"/>
+          <p:cNvSpPr txBox="1"/>
+          <p:nvPr/>
+        </p:nvSpPr>
+        <p:spPr>
+          <a:xfrm>
+            <a:off x="914400" y="4037990"/>
+            <a:ext cx="10360152" cy="822960"/>
+          </a:xfrm>
+          <a:prstGeom prst="rect">
+            <a:avLst/>
+          </a:prstGeom>
+          <a:noFill/>
+        </p:spPr>
+        <p:txBody>
+          <a:bodyPr wrap="square" anchor="ctr">
+            <a:spAutoFit/>
+          </a:bodyPr>
+          <a:lstStyle/>
+          <a:p>
+            <a:pPr algn="ctr"/>
+            <a:r>
+              <a:rPr sz="2400" b="1">
+                <a:solidFill>
+                  <a:srgbClr val="F2F3F7"/>
+                </a:solidFill>
+                <a:latin typeface="Meiryo"/>
+              </a:rPr>
+              <a:t>ご清聴ありがとうございました</a:t>
+            </a:r>
+          </a:p>
+        </p:txBody>
+      </p:sp>
+      <p:sp>
+        <p:nvSpPr>
+          <p:cNvPr id="7" name="TextBox 6"/>
+          <p:cNvSpPr txBox="1"/>
+          <p:nvPr/>
+        </p:nvSpPr>
+        <p:spPr>
+          <a:xfrm>
+            <a:off x="914400" y="4860950"/>
+            <a:ext cx="10360152" cy="548640"/>
+          </a:xfrm>
+          <a:prstGeom prst="rect">
+            <a:avLst/>
+          </a:prstGeom>
+          <a:noFill/>
+        </p:spPr>
+        <p:txBody>
+          <a:bodyPr wrap="square" anchor="ctr">
+            <a:spAutoFit/>
+          </a:bodyPr>
+          <a:lstStyle/>
+          <a:p>
+            <a:pPr algn="ctr"/>
+            <a:r>
+              <a:rPr sz="1500" b="0">
+                <a:solidFill>
+                  <a:srgbClr val="9A9AAA"/>
+                </a:solidFill>
+                <a:latin typeface="Meiryo"/>
+              </a:rPr>
+              <a:t>映像制作のための レビュー ＆ 進行管理ツール</a:t>
+            </a:r>
+          </a:p>
+        </p:txBody>
+      </p:sp>
+      <p:sp>
+        <p:nvSpPr>
+          <p:cNvPr id="8" name="TextBox 7"/>
+          <p:cNvSpPr txBox="1"/>
+          <p:nvPr/>
+        </p:nvSpPr>
+        <p:spPr>
+          <a:xfrm>
+            <a:off x="914400" y="6263640"/>
+            <a:ext cx="10360152" cy="365760"/>
+          </a:xfrm>
+          <a:prstGeom prst="rect">
+            <a:avLst/>
+          </a:prstGeom>
+          <a:noFill/>
+        </p:spPr>
+        <p:txBody>
+          <a:bodyPr wrap="square" anchor="ctr">
+            <a:spAutoFit/>
+          </a:bodyPr>
+          <a:lstStyle/>
+          <a:p>
+            <a:pPr algn="ctr"/>
+            <a:r>
+              <a:rPr sz="1200" b="0">
+                <a:solidFill>
+                  <a:srgbClr val="5A9BFF"/>
+                </a:solidFill>
+                <a:latin typeface="Meiryo"/>
+              </a:rPr>
+              <a:t>https://ogshaw03.github.io/laycat/</a:t>
             </a:r>
           </a:p>
         </p:txBody>

--- a/docs/LayCAT_紹介プレゼン.pptx
+++ b/docs/LayCAT_紹介プレゼン.pptx
@@ -5414,7 +5414,7 @@
       </p:sp>
       <p:pic>
         <p:nvPicPr>
-          <p:cNvPr id="5" name="Picture 4" descr="laycat_icon.png"/>
+          <p:cNvPr id="5" name="Picture 4" descr="laycat_icon_login.png"/>
           <p:cNvPicPr>
             <a:picLocks noChangeAspect="1"/>
           </p:cNvPicPr>
@@ -5428,8 +5428,8 @@
         </p:blipFill>
         <p:spPr>
           <a:xfrm>
-            <a:off x="3078327" y="2148840"/>
-            <a:ext cx="6035040" cy="1569110"/>
+            <a:off x="3718407" y="1325880"/>
+            <a:ext cx="4754880" cy="2668307"/>
           </a:xfrm>
           <a:prstGeom prst="rect">
             <a:avLst/>
@@ -5444,7 +5444,7 @@
         </p:nvSpPr>
         <p:spPr>
           <a:xfrm>
-            <a:off x="914400" y="4037990"/>
+            <a:off x="914400" y="4268507"/>
             <a:ext cx="10360152" cy="822960"/>
           </a:xfrm>
           <a:prstGeom prst="rect">
@@ -5474,41 +5474,6 @@
       <p:sp>
         <p:nvSpPr>
           <p:cNvPr id="7" name="TextBox 6"/>
-          <p:cNvSpPr txBox="1"/>
-          <p:nvPr/>
-        </p:nvSpPr>
-        <p:spPr>
-          <a:xfrm>
-            <a:off x="914400" y="4860950"/>
-            <a:ext cx="10360152" cy="548640"/>
-          </a:xfrm>
-          <a:prstGeom prst="rect">
-            <a:avLst/>
-          </a:prstGeom>
-          <a:noFill/>
-        </p:spPr>
-        <p:txBody>
-          <a:bodyPr wrap="square" anchor="ctr">
-            <a:spAutoFit/>
-          </a:bodyPr>
-          <a:lstStyle/>
-          <a:p>
-            <a:pPr algn="ctr"/>
-            <a:r>
-              <a:rPr sz="1500" b="0">
-                <a:solidFill>
-                  <a:srgbClr val="9A9AAA"/>
-                </a:solidFill>
-                <a:latin typeface="Meiryo"/>
-              </a:rPr>
-              <a:t>映像制作のための レビュー ＆ 進行管理ツール</a:t>
-            </a:r>
-          </a:p>
-        </p:txBody>
-      </p:sp>
-      <p:sp>
-        <p:nvSpPr>
-          <p:cNvPr id="8" name="TextBox 7"/>
           <p:cNvSpPr txBox="1"/>
           <p:nvPr/>
         </p:nvSpPr>
